--- a/cursos/recursos/desequilibrios-de-material/11-sacrificios-de-peon-planes.pptx
+++ b/cursos/recursos/desequilibrios-de-material/11-sacrificios-de-peon-planes.pptx
@@ -3484,7 +3484,7 @@
                 </a:solidFill>
                 <a:latin typeface="Calibri"/>
               </a:rPr>
-              <a:t>Pista: Pensá en avanzar el peón g, aunque parezca menos forzado que otras jugadas de desarrollo.</a:t>
+              <a:t>Pista: Piensa en avanzar el peón g, aunque parezca menos forzado que otras jugadas de desarrollo.</a:t>
             </a:r>
           </a:p>
         </p:txBody>
@@ -3807,7 +3807,7 @@
                 </a:solidFill>
                 <a:latin typeface="Calibri"/>
               </a:rPr>
-              <a:t>Pista: Pensá en retirar el caballo hacia una casilla desde la que pueda apoyar el avance del peón h.</a:t>
+              <a:t>Pista: Piensa en retirar el caballo hacia una casilla desde la que pueda apoyar el avance del peón h.</a:t>
             </a:r>
           </a:p>
         </p:txBody>
@@ -4130,7 +4130,7 @@
                 </a:solidFill>
                 <a:latin typeface="Calibri"/>
               </a:rPr>
-              <a:t>Pista: Pensá en avanzar el peón b, atacando al peón c5 negro y abriendo la columna b para las torres.</a:t>
+              <a:t>Pista: Piensa en avanzar el peón b, atacando al peón c5 negro y abriendo la columna b para las torres.</a:t>
             </a:r>
           </a:p>
         </p:txBody>
@@ -4453,7 +4453,7 @@
                 </a:solidFill>
                 <a:latin typeface="Calibri"/>
               </a:rPr>
-              <a:t>Pista: Pensá en reubicar una torre a una casilla desde la que pueda sumarse rápido a la columna g, defendiendo de paso el peón h3.</a:t>
+              <a:t>Pista: Piensa en reubicar una torre a una casilla desde la que pueda sumarse rápido a la columna g, defendiendo de paso el peón h3.</a:t>
             </a:r>
           </a:p>
         </p:txBody>
@@ -4674,7 +4674,7 @@
                 </a:solidFill>
                 <a:latin typeface="Calibri"/>
               </a:rPr>
-              <a:t>•  Sacrificar un peón para encerrar una pieza rival de forma permanente puede ser mucho más valioso que ganar material: contá siempre cuántas piezas están realmente participando en el juego, no sólo el marcador material.</a:t>
+              <a:t>•  Sacrificar un peón para encerrar una pieza rival de forma permanente puede ser mucho más valioso que ganar material: cuenta siempre cuántas piezas están realmente participando en el juego, no sólo el marcador material.</a:t>
             </a:r>
           </a:p>
           <a:p>
@@ -4706,7 +4706,7 @@
                 </a:solidFill>
                 <a:latin typeface="Calibri"/>
               </a:rPr>
-              <a:t>•  Cuando el rival tiene una pieza prácticamente fuera de juego, jugá con tranquilidad: no hace falta forzar nada, alcanza con ampliar la ventaja poco a poco en el resto del tablero.</a:t>
+              <a:t>•  Cuando el rival tiene una pieza prácticamente fuera de juego, juega con tranquilidad: no hace falta forzar nada, alcanza con ampliar la ventaja poco a poco en el resto del tablero.</a:t>
             </a:r>
           </a:p>
         </p:txBody>
@@ -4904,7 +4904,7 @@
                 </a:solidFill>
                 <a:latin typeface="Calibri"/>
               </a:rPr>
-              <a:t>•  Antes de aceptar un sacrificio de pieza aparentemente ganador, calculá con cuidado las combinaciones tácticas escondidas: una captura 'obvia' puede estar refutada por un recurso intermedio.</a:t>
+              <a:t>•  Antes de aceptar un sacrificio de pieza aparentemente ganador, calcula con cuidado las combinaciones tácticas escondidas: una captura 'obvia' puede estar refutada por un recurso intermedio.</a:t>
             </a:r>
           </a:p>
           <a:p>
@@ -5308,7 +5308,7 @@
                 </a:solidFill>
                 <a:latin typeface="Calibri"/>
               </a:rPr>
-              <a:t>Pista: Pensá en avanzar el peón f, ya apoyado por las piezas blancas.</a:t>
+              <a:t>Pista: Piensa en avanzar el peón f, ya apoyado por las piezas blancas.</a:t>
             </a:r>
           </a:p>
         </p:txBody>
@@ -5631,7 +5631,7 @@
                 </a:solidFill>
                 <a:latin typeface="Calibri"/>
               </a:rPr>
-              <a:t>Pista: Pensá en reubicar el caballo hacia el flanco de rey, listo para apoyar la casilla f5 desde una nueva diagonal.</a:t>
+              <a:t>Pista: Piensa en reubicar el caballo hacia el flanco de rey, listo para apoyar la casilla f5 desde una nueva diagonal.</a:t>
             </a:r>
           </a:p>
         </p:txBody>
@@ -5954,7 +5954,7 @@
                 </a:solidFill>
                 <a:latin typeface="Calibri"/>
               </a:rPr>
-              <a:t>Pista: Pensá en avanzar el peón e un paso más, aunque parezca entregarse con facilidad.</a:t>
+              <a:t>Pista: Piensa en avanzar el peón e un paso más, aunque parezca entregarse con facilidad.</a:t>
             </a:r>
           </a:p>
         </p:txBody>
@@ -6452,7 +6452,7 @@
                 </a:solidFill>
                 <a:latin typeface="Calibri"/>
               </a:rPr>
-              <a:t>Pista: Pensá en avanzar el peón d, entregándolo con tal de mantener la iniciativa y las líneas abiertas.</a:t>
+              <a:t>Pista: Piensa en avanzar el peón d, entregándolo con tal de mantener la iniciativa y las líneas abiertas.</a:t>
             </a:r>
           </a:p>
         </p:txBody>
@@ -6775,7 +6775,7 @@
                 </a:solidFill>
                 <a:latin typeface="Calibri"/>
               </a:rPr>
-              <a:t>Pista: Pensá en capturar un peón negro con el alfil, confiando en que la recaptura le costará material a las negras.</a:t>
+              <a:t>Pista: Piensa en capturar un peón negro con el alfil, confiando en que la recaptura le costará material a las negras.</a:t>
             </a:r>
           </a:p>
         </p:txBody>
@@ -7012,7 +7012,7 @@
                 </a:solidFill>
                 <a:latin typeface="Calibri"/>
               </a:rPr>
-              <a:t>•  Antes de aceptar un sacrificio de pieza aparentemente ganador, calculá con cuidado las combinaciones tácticas escondidas: una captura 'obvia' puede estar refutada por un recurso intermedio.</a:t>
+              <a:t>•  Antes de aceptar un sacrificio de pieza aparentemente ganador, calcula con cuidado las combinaciones tácticas escondidas: una captura 'obvia' puede estar refutada por un recurso intermedio.</a:t>
             </a:r>
           </a:p>
           <a:p>
@@ -7210,7 +7210,7 @@
                 </a:solidFill>
                 <a:latin typeface="Calibri"/>
               </a:rPr>
-              <a:t>•  En la estructura de India de Rey de Tipo III (con cualquier color), memorizá el recurso ...c5-c4 (o su espejo c4-c5): es la ruptura temática que suele otorgar una ventaja decisiva si el rival no está preparado para ella.</a:t>
+              <a:t>•  En la estructura de India de Rey de Tipo III (con cualquier color), memoriza el recurso ...c5-c4 (o su espejo c4-c5): es la ruptura temática que suele otorgar una ventaja decisiva si el rival no está preparado para ella.</a:t>
             </a:r>
           </a:p>
           <a:p>
@@ -7242,7 +7242,7 @@
                 </a:solidFill>
                 <a:latin typeface="Calibri"/>
               </a:rPr>
-              <a:t>•  No siempre hace falta recuperar el material sacrificado para ganar la partida: si tu ventaja posicional es lo bastante grande, podés directamente completar el plan y dejar el peón invertido atrás.</a:t>
+              <a:t>•  No siempre hace falta recuperar el material sacrificado para ganar la partida: si tu ventaja posicional es lo bastante grande, puedes directamente completar el plan y dejar el peón invertido atrás.</a:t>
             </a:r>
           </a:p>
         </p:txBody>
@@ -7630,7 +7630,7 @@
                 </a:solidFill>
                 <a:latin typeface="Calibri"/>
               </a:rPr>
-              <a:t>Pista: Pensá en avanzar el peón c, abriendo el camino para transformar el peón d4 en un pasado protegido más adelante.</a:t>
+              <a:t>Pista: Piensa en avanzar el peón c, abriendo el camino para transformar el peón d4 en un pasado protegido más adelante.</a:t>
             </a:r>
           </a:p>
         </p:txBody>
@@ -7953,7 +7953,7 @@
                 </a:solidFill>
                 <a:latin typeface="Calibri"/>
               </a:rPr>
-              <a:t>Pista: Pensá en seguir avanzando el mismo peón un paso más, ofreciendo el cambio con el peón c2 blanco.</a:t>
+              <a:t>Pista: Piensa en seguir avanzando el mismo peón un paso más, ofreciendo el cambio con el peón c2 blanco.</a:t>
             </a:r>
           </a:p>
         </p:txBody>
@@ -8276,7 +8276,7 @@
                 </a:solidFill>
                 <a:latin typeface="Calibri"/>
               </a:rPr>
-              <a:t>Pista: Pensá en una jugada de dama sencilla hacia una casilla activa, ignorando por completo el peón ofrecido.</a:t>
+              <a:t>Pista: Piensa en una jugada de dama sencilla hacia una casilla activa, ignorando por completo el peón ofrecido.</a:t>
             </a:r>
           </a:p>
         </p:txBody>
@@ -8599,7 +8599,7 @@
                 </a:solidFill>
                 <a:latin typeface="Calibri"/>
               </a:rPr>
-              <a:t>Pista: Pensá en ofrecer el cambio del propio alfil por el alfil más peligroso del rival, aceptando simplificar la posición.</a:t>
+              <a:t>Pista: Piensa en ofrecer el cambio del propio alfil por el alfil más peligroso del rival, aceptando simplificar la posición.</a:t>
             </a:r>
           </a:p>
         </p:txBody>
@@ -8922,7 +8922,7 @@
                 </a:solidFill>
                 <a:latin typeface="Calibri"/>
               </a:rPr>
-              <a:t>Pista: Pensá en un salto de caballo hacia el flanco de dama, atacando la torre a1 y amenazando profundizar el desequilibrio de peones.</a:t>
+              <a:t>Pista: Piensa en un salto de caballo hacia el flanco de dama, atacando la torre a1 y amenazando profundizar el desequilibrio de peones.</a:t>
             </a:r>
           </a:p>
         </p:txBody>
@@ -9302,7 +9302,7 @@
                 </a:solidFill>
                 <a:latin typeface="Calibri"/>
               </a:rPr>
-              <a:t>•  En la estructura de India de Rey de Tipo III (con cualquier color), memorizá el recurso ...c5-c4 (o su espejo c4-c5): es la ruptura temática que suele otorgar una ventaja decisiva si el rival no está preparado para ella.</a:t>
+              <a:t>•  En la estructura de India de Rey de Tipo III (con cualquier color), memoriza el recurso ...c5-c4 (o su espejo c4-c5): es la ruptura temática que suele otorgar una ventaja decisiva si el rival no está preparado para ella.</a:t>
             </a:r>
           </a:p>
           <a:p>
@@ -9334,7 +9334,7 @@
                 </a:solidFill>
                 <a:latin typeface="Calibri"/>
               </a:rPr>
-              <a:t>•  No siempre hace falta recuperar el material sacrificado para ganar la partida: si tu ventaja posicional es lo bastante grande, podés directamente completar el plan y dejar el peón invertido atrás.</a:t>
+              <a:t>•  No siempre hace falta recuperar el material sacrificado para ganar la partida: si tu ventaja posicional es lo bastante grande, puedes directamente completar el plan y dejar el peón invertido atrás.</a:t>
             </a:r>
           </a:p>
         </p:txBody>
@@ -9477,7 +9477,7 @@
                 </a:solidFill>
                 <a:latin typeface="Calibri"/>
               </a:rPr>
-              <a:t>Jugá contra el motor la posición de McShane–Lu Shanglei con las blancas, practicando cómo encerrar una pieza rival a cambio de un simple peón. Después compará la estructura de Flores Rios–Pancevski con una partida de Gambito de Dama Aceptado que conozcas, identificando en qué se parece la compensación obtenida.</a:t>
+              <a:t>Juega contra el motor la posición de McShane–Lu Shanglei con las blancas, practicando cómo encerrar una pieza rival a cambio de un simple peón. Después compará la estructura de Flores Rios–Pancevski con una partida de Gambito de Dama Aceptado que conozcas, identificando en qué se parece la compensación obtenida.</a:t>
             </a:r>
           </a:p>
           <a:p>
@@ -9509,7 +9509,7 @@
                 </a:solidFill>
                 <a:latin typeface="Calibri"/>
               </a:rPr>
-              <a:t>En la página del curso podés recorrer cada partida con los comentarios, adivinar las jugadas clave en el tablero y continuar cualquier posición contra el motor (Stockfish). La hoja de ejercicios en PDF reúne los momentos clave de esta lección para resolver sin tablero.</a:t>
+              <a:t>En la página del curso puedes recorrer cada partida con los comentarios, adivinar las jugadas clave en el tablero y continuar cualquier posición contra el motor (Stockfish). La hoja de ejercicios en PDF reúne los momentos clave de esta lección para resolver sin tablero.</a:t>
             </a:r>
           </a:p>
         </p:txBody>
@@ -9548,7 +9548,7 @@
                 </a:solidFill>
                 <a:latin typeface="Calibri"/>
               </a:rPr>
-              <a:t>•  Primero recorré la partida completa leyendo los comentarios.</a:t>
+              <a:t>•  Primero recorre la partida completa leyendo los comentarios.</a:t>
             </a:r>
           </a:p>
           <a:p>
@@ -9564,7 +9564,7 @@
                 </a:solidFill>
                 <a:latin typeface="Calibri"/>
               </a:rPr>
-              <a:t>•  Después hacé el modo "adivinar las jugadas clave" hasta acertar todas.</a:t>
+              <a:t>•  Después haz el modo "adivinar las jugadas clave" hasta acertar todas.</a:t>
             </a:r>
           </a:p>
           <a:p>
@@ -9580,7 +9580,7 @@
                 </a:solidFill>
                 <a:latin typeface="Calibri"/>
               </a:rPr>
-              <a:t>•  Por último respondé el cuestionario y anotá con tus palabras las reglas de la lección.</a:t>
+              <a:t>•  Por último responde el cuestionario y anota con tus palabras las reglas de la lección.</a:t>
             </a:r>
           </a:p>
         </p:txBody>
@@ -10025,7 +10025,7 @@
                 </a:solidFill>
                 <a:latin typeface="Calibri"/>
               </a:rPr>
-              <a:t>•  Medí la compensación en tiempos de jugada y calidad de piezas, no en cantidad de peones.</a:t>
+              <a:t>•  Mide la compensación en tiempos de jugada y calidad de piezas, no en cantidad de peones.</a:t>
             </a:r>
           </a:p>
           <a:p>
@@ -10041,7 +10041,7 @@
                 </a:solidFill>
                 <a:latin typeface="Calibri"/>
               </a:rPr>
-              <a:t>•  Si sacrificás por desarrollo, usá los tiempos ganados para coordinar piezas, no para recuperar el peón.</a:t>
+              <a:t>•  Si sacrificas por desarrollo, usa los tiempos ganados para coordinar piezas, no para recuperar el peón.</a:t>
             </a:r>
           </a:p>
           <a:p>
@@ -10057,7 +10057,7 @@
                 </a:solidFill>
                 <a:latin typeface="Calibri"/>
               </a:rPr>
-              <a:t>•  Si sacrificás por estructura, no te preocupes si el peón nunca se recupera: las debilidades rivales pueden bastar.</a:t>
+              <a:t>•  Si sacrificas por estructura, no te preocupes si el peón nunca se recupera: las debilidades rivales pueden bastar.</a:t>
             </a:r>
           </a:p>
           <a:p>
@@ -10073,7 +10073,7 @@
                 </a:solidFill>
                 <a:latin typeface="Calibri"/>
               </a:rPr>
-              <a:t>•  Si aceptás el peón, priorizá completar tu desarrollo antes que aferrarte al material ganado.</a:t>
+              <a:t>•  Si aceptas el peón, prioriza completar tu desarrollo antes que aferrarte al material ganado.</a:t>
             </a:r>
           </a:p>
           <a:p>
@@ -10089,7 +10089,7 @@
                 </a:solidFill>
                 <a:latin typeface="Calibri"/>
               </a:rPr>
-              <a:t>•  Reconocé las estructuras de apertura (Benko, Benoni, Erizo y similares) donde el sacrificio de peón es parte del plan.</a:t>
+              <a:t>•  Reconoce las estructuras de apertura (Benko, Benoni, Erizo y similares) donde el sacrificio de peón es parte del plan.</a:t>
             </a:r>
           </a:p>
         </p:txBody>
@@ -10271,7 +10271,7 @@
                 </a:solidFill>
                 <a:latin typeface="Calibri"/>
               </a:rPr>
-              <a:t>•  Sacrificar un peón para encerrar una pieza rival de forma permanente puede ser mucho más valioso que ganar material: contá siempre cuántas piezas están realmente participando en el juego, no sólo el marcador material.</a:t>
+              <a:t>•  Sacrificar un peón para encerrar una pieza rival de forma permanente puede ser mucho más valioso que ganar material: cuenta siempre cuántas piezas están realmente participando en el juego, no sólo el marcador material.</a:t>
             </a:r>
           </a:p>
           <a:p>
@@ -10303,7 +10303,7 @@
                 </a:solidFill>
                 <a:latin typeface="Calibri"/>
               </a:rPr>
-              <a:t>•  Cuando el rival tiene una pieza prácticamente fuera de juego, jugá con tranquilidad: no hace falta forzar nada, alcanza con ampliar la ventaja poco a poco en el resto del tablero.</a:t>
+              <a:t>•  Cuando el rival tiene una pieza prácticamente fuera de juego, juega con tranquilidad: no hace falta forzar nada, alcanza con ampliar la ventaja poco a poco en el resto del tablero.</a:t>
             </a:r>
           </a:p>
         </p:txBody>
@@ -10691,7 +10691,7 @@
                 </a:solidFill>
                 <a:latin typeface="Calibri"/>
               </a:rPr>
-              <a:t>Pista: Pensá en avanzar el peón f, abriendo líneas hacia el rey negro.</a:t>
+              <a:t>Pista: Piensa en avanzar el peón f, abriendo líneas hacia el rey negro.</a:t>
             </a:r>
           </a:p>
         </p:txBody>
